--- a/lecons/LSA/Hydrology/01_LSA_HYDRO_L22_Introduction_to_Hydrology.pptx
+++ b/lecons/LSA/Hydrology/01_LSA_HYDRO_L22_Introduction_to_Hydrology.pptx
@@ -3460,7 +3460,7 @@
           <a:p>
             <a:r>
               <a:rPr lang="en-US" dirty="0"/>
-              <a:t>Before we start the new lesson, let us correct the homework I gave you at the end of Further Study 3: The Climate of Cameroon. The question was: Draw the climate map of Cameroon and write one town for each climate type. Take out your exercise books.</a:t>
+              <a:t>Before we start the new lesson, let us correct the homework I gave you at the end of Further Study 3: The Climate of Cameroon. The question was: Define hydrology. Take out your exercise books.</a:t>
             </a:r>
             <a:endParaRPr lang="en-US" dirty="0"/>
           </a:p>
@@ -4428,7 +4428,7 @@
           <a:p>
             <a:r>
               <a:rPr lang="en-US" dirty="0"/>
-              <a:t>Here is a good answer. Map: Cameroon (maritime) type – Douala; Guinea type – Yaoundé; mountain type – Bamenda; humid tropical type – Garoua; dry tropical type – Maroua. Compare it with your own answer and correct your work in red.</a:t>
+              <a:t>Here is a good answer. Hydrology is the science that studies water on and under the surface of the Earth, its movements and its distribution. Compare it with your own answer and correct your work in red.</a:t>
             </a:r>
             <a:endParaRPr lang="en-US" dirty="0"/>
           </a:p>
@@ -15106,7 +15106,7 @@
                 <a:ea typeface="Times New Roman" pitchFamily="34" charset="-122"/>
                 <a:cs typeface="Times New Roman" pitchFamily="34" charset="-120"/>
               </a:rPr>
-              <a:t>Draw the climate map of Cameroon and write one town for each climate type.</a:t>
+              <a:t>Define hydrology.</a:t>
             </a:r>
             <a:endParaRPr lang="en-US" sz="4000" dirty="0"/>
           </a:p>
@@ -17647,7 +17647,7 @@
                 <a:ea typeface="Times New Roman" pitchFamily="34" charset="-122"/>
                 <a:cs typeface="Times New Roman" pitchFamily="34" charset="-120"/>
               </a:rPr>
-              <a:t>Map: Cameroon (maritime) type – Douala; Guinea type – Yaoundé; mountain type – Bamenda; humid tropical type – Garoua; dry tropical type – Maroua.</a:t>
+              <a:t>Hydrology is the science that studies water on and under the surface of the Earth, its movements and its distribution.</a:t>
             </a:r>
             <a:endParaRPr lang="en-US" sz="4000" dirty="0"/>
           </a:p>

--- a/lecons/LSA/Hydrology/01_LSA_HYDRO_L22_Introduction_to_Hydrology.pptx
+++ b/lecons/LSA/Hydrology/01_LSA_HYDRO_L22_Introduction_to_Hydrology.pptx
@@ -3460,7 +3460,7 @@
           <a:p>
             <a:r>
               <a:rPr lang="en-US" dirty="0"/>
-              <a:t>Before we start the new lesson, let us correct the homework I gave you at the end of Further Study 3: The Climate of Cameroon. The question was: Define hydrology. Take out your exercise books.</a:t>
+              <a:t>Before we start the new lesson, let us correct the homework I gave you at the end of Further Study 2: Weather Observation, Prediction, Modification and Mapping. The question was: Define hydrology. Take out your exercise books.</a:t>
             </a:r>
             <a:endParaRPr lang="en-US" dirty="0"/>
           </a:p>
@@ -15086,7 +15086,7 @@
                 <a:ea typeface="Times New Roman" pitchFamily="34" charset="-122"/>
                 <a:cs typeface="Times New Roman" pitchFamily="34" charset="-120"/>
               </a:rPr>
-              <a:t>Question (Further Study 3: The Climate of Cameroon):</a:t>
+              <a:t>Question (Further Study 2: Weather Observation, Prediction, Modification and Mapping):</a:t>
             </a:r>
             <a:endParaRPr lang="en-US" sz="4000" dirty="0"/>
           </a:p>
